--- a/figures/Figure.pptx
+++ b/figures/Figure.pptx
@@ -197,7 +197,7 @@
           <a:p>
             <a:fld id="{CE73301D-03C5-7748-A458-723CB51AA071}" type="datetimeFigureOut">
               <a:rPr lang="fr-FR" smtClean="0"/>
-              <a:t>21/07/2025</a:t>
+              <a:t>27/05/2026</a:t>
             </a:fld>
             <a:endParaRPr lang="fr-FR"/>
           </a:p>
@@ -684,7 +684,7 @@
           <a:p>
             <a:fld id="{D08D4259-DE4D-E545-9A13-469D27F252E6}" type="datetimeFigureOut">
               <a:rPr lang="fr-FR" smtClean="0"/>
-              <a:t>21/07/2025</a:t>
+              <a:t>27/05/2026</a:t>
             </a:fld>
             <a:endParaRPr lang="fr-FR"/>
           </a:p>
@@ -854,7 +854,7 @@
           <a:p>
             <a:fld id="{D08D4259-DE4D-E545-9A13-469D27F252E6}" type="datetimeFigureOut">
               <a:rPr lang="fr-FR" smtClean="0"/>
-              <a:t>21/07/2025</a:t>
+              <a:t>27/05/2026</a:t>
             </a:fld>
             <a:endParaRPr lang="fr-FR"/>
           </a:p>
@@ -1034,7 +1034,7 @@
           <a:p>
             <a:fld id="{D08D4259-DE4D-E545-9A13-469D27F252E6}" type="datetimeFigureOut">
               <a:rPr lang="fr-FR" smtClean="0"/>
-              <a:t>21/07/2025</a:t>
+              <a:t>27/05/2026</a:t>
             </a:fld>
             <a:endParaRPr lang="fr-FR"/>
           </a:p>
@@ -1204,7 +1204,7 @@
           <a:p>
             <a:fld id="{D08D4259-DE4D-E545-9A13-469D27F252E6}" type="datetimeFigureOut">
               <a:rPr lang="fr-FR" smtClean="0"/>
-              <a:t>21/07/2025</a:t>
+              <a:t>27/05/2026</a:t>
             </a:fld>
             <a:endParaRPr lang="fr-FR"/>
           </a:p>
@@ -1450,7 +1450,7 @@
           <a:p>
             <a:fld id="{D08D4259-DE4D-E545-9A13-469D27F252E6}" type="datetimeFigureOut">
               <a:rPr lang="fr-FR" smtClean="0"/>
-              <a:t>21/07/2025</a:t>
+              <a:t>27/05/2026</a:t>
             </a:fld>
             <a:endParaRPr lang="fr-FR"/>
           </a:p>
@@ -1682,7 +1682,7 @@
           <a:p>
             <a:fld id="{D08D4259-DE4D-E545-9A13-469D27F252E6}" type="datetimeFigureOut">
               <a:rPr lang="fr-FR" smtClean="0"/>
-              <a:t>21/07/2025</a:t>
+              <a:t>27/05/2026</a:t>
             </a:fld>
             <a:endParaRPr lang="fr-FR"/>
           </a:p>
@@ -2049,7 +2049,7 @@
           <a:p>
             <a:fld id="{D08D4259-DE4D-E545-9A13-469D27F252E6}" type="datetimeFigureOut">
               <a:rPr lang="fr-FR" smtClean="0"/>
-              <a:t>21/07/2025</a:t>
+              <a:t>27/05/2026</a:t>
             </a:fld>
             <a:endParaRPr lang="fr-FR"/>
           </a:p>
@@ -2167,7 +2167,7 @@
           <a:p>
             <a:fld id="{D08D4259-DE4D-E545-9A13-469D27F252E6}" type="datetimeFigureOut">
               <a:rPr lang="fr-FR" smtClean="0"/>
-              <a:t>21/07/2025</a:t>
+              <a:t>27/05/2026</a:t>
             </a:fld>
             <a:endParaRPr lang="fr-FR"/>
           </a:p>
@@ -2262,7 +2262,7 @@
           <a:p>
             <a:fld id="{D08D4259-DE4D-E545-9A13-469D27F252E6}" type="datetimeFigureOut">
               <a:rPr lang="fr-FR" smtClean="0"/>
-              <a:t>21/07/2025</a:t>
+              <a:t>27/05/2026</a:t>
             </a:fld>
             <a:endParaRPr lang="fr-FR"/>
           </a:p>
@@ -2539,7 +2539,7 @@
           <a:p>
             <a:fld id="{D08D4259-DE4D-E545-9A13-469D27F252E6}" type="datetimeFigureOut">
               <a:rPr lang="fr-FR" smtClean="0"/>
-              <a:t>21/07/2025</a:t>
+              <a:t>27/05/2026</a:t>
             </a:fld>
             <a:endParaRPr lang="fr-FR"/>
           </a:p>
@@ -2796,7 +2796,7 @@
           <a:p>
             <a:fld id="{D08D4259-DE4D-E545-9A13-469D27F252E6}" type="datetimeFigureOut">
               <a:rPr lang="fr-FR" smtClean="0"/>
-              <a:t>21/07/2025</a:t>
+              <a:t>27/05/2026</a:t>
             </a:fld>
             <a:endParaRPr lang="fr-FR"/>
           </a:p>
@@ -3009,7 +3009,7 @@
           <a:p>
             <a:fld id="{D08D4259-DE4D-E545-9A13-469D27F252E6}" type="datetimeFigureOut">
               <a:rPr lang="fr-FR" smtClean="0"/>
-              <a:t>21/07/2025</a:t>
+              <a:t>27/05/2026</a:t>
             </a:fld>
             <a:endParaRPr lang="fr-FR"/>
           </a:p>
@@ -3416,10 +3416,10 @@
       </p:grpSpPr>
       <p:pic>
         <p:nvPicPr>
-          <p:cNvPr id="4" name="Image 3">
+          <p:cNvPr id="47" name="Graphique 46">
             <a:extLst>
               <a:ext uri="{FF2B5EF4-FFF2-40B4-BE49-F238E27FC236}">
-                <a16:creationId xmlns:a16="http://schemas.microsoft.com/office/drawing/2014/main" id="{D2AE19E4-FA08-4ABD-3CD9-134204868ACE}"/>
+                <a16:creationId xmlns:a16="http://schemas.microsoft.com/office/drawing/2014/main" id="{29EC4BC0-F51B-28AD-0664-49FDD7012331}"/>
               </a:ext>
             </a:extLst>
           </p:cNvPr>
@@ -3429,15 +3429,21 @@
           <p:nvPr/>
         </p:nvPicPr>
         <p:blipFill>
-          <a:blip r:embed="rId3"/>
+          <a:blip r:embed="rId3">
+            <a:extLst>
+              <a:ext uri="{96DAC541-7B7A-43D3-8B79-37D633B846F1}">
+                <asvg:svgBlip xmlns:asvg="http://schemas.microsoft.com/office/drawing/2016/SVG/main" r:embed="rId4"/>
+              </a:ext>
+            </a:extLst>
+          </a:blip>
           <a:stretch>
             <a:fillRect/>
           </a:stretch>
         </p:blipFill>
         <p:spPr>
           <a:xfrm>
-            <a:off x="79533" y="70186"/>
-            <a:ext cx="2120765" cy="2033924"/>
+            <a:off x="4164888" y="38074"/>
+            <a:ext cx="2084437" cy="2084437"/>
           </a:xfrm>
           <a:prstGeom prst="rect">
             <a:avLst/>
@@ -3446,10 +3452,10 @@
       </p:pic>
       <p:pic>
         <p:nvPicPr>
-          <p:cNvPr id="11" name="Image 10">
+          <p:cNvPr id="33" name="Graphique 32">
             <a:extLst>
               <a:ext uri="{FF2B5EF4-FFF2-40B4-BE49-F238E27FC236}">
-                <a16:creationId xmlns:a16="http://schemas.microsoft.com/office/drawing/2014/main" id="{D959EFD5-376F-FDD7-8463-D8E4D533CAF8}"/>
+                <a16:creationId xmlns:a16="http://schemas.microsoft.com/office/drawing/2014/main" id="{AA86137A-8465-EC1E-B1E2-F6893DD0898A}"/>
               </a:ext>
             </a:extLst>
           </p:cNvPr>
@@ -3459,15 +3465,21 @@
           <p:nvPr/>
         </p:nvPicPr>
         <p:blipFill>
-          <a:blip r:embed="rId4"/>
+          <a:blip r:embed="rId5">
+            <a:extLst>
+              <a:ext uri="{96DAC541-7B7A-43D3-8B79-37D633B846F1}">
+                <asvg:svgBlip xmlns:asvg="http://schemas.microsoft.com/office/drawing/2016/SVG/main" r:embed="rId6"/>
+              </a:ext>
+            </a:extLst>
+          </a:blip>
           <a:stretch>
             <a:fillRect/>
           </a:stretch>
         </p:blipFill>
         <p:spPr>
           <a:xfrm>
-            <a:off x="2187503" y="90343"/>
-            <a:ext cx="2120765" cy="2033924"/>
+            <a:off x="33305" y="37788"/>
+            <a:ext cx="2085975" cy="2085975"/>
           </a:xfrm>
           <a:prstGeom prst="rect">
             <a:avLst/>
@@ -3476,10 +3488,10 @@
       </p:pic>
       <p:pic>
         <p:nvPicPr>
-          <p:cNvPr id="15" name="Image 14">
+          <p:cNvPr id="35" name="Graphique 34">
             <a:extLst>
               <a:ext uri="{FF2B5EF4-FFF2-40B4-BE49-F238E27FC236}">
-                <a16:creationId xmlns:a16="http://schemas.microsoft.com/office/drawing/2014/main" id="{81122D48-2E33-D78F-5A7F-AE3BCB92942A}"/>
+                <a16:creationId xmlns:a16="http://schemas.microsoft.com/office/drawing/2014/main" id="{E6003AA8-0421-2CA9-60A3-601CBE75177B}"/>
               </a:ext>
             </a:extLst>
           </p:cNvPr>
@@ -3489,15 +3501,21 @@
           <p:nvPr/>
         </p:nvPicPr>
         <p:blipFill>
-          <a:blip r:embed="rId5"/>
+          <a:blip r:embed="rId7">
+            <a:extLst>
+              <a:ext uri="{96DAC541-7B7A-43D3-8B79-37D633B846F1}">
+                <asvg:svgBlip xmlns:asvg="http://schemas.microsoft.com/office/drawing/2016/SVG/main" r:embed="rId8"/>
+              </a:ext>
+            </a:extLst>
+          </a:blip>
           <a:stretch>
             <a:fillRect/>
           </a:stretch>
         </p:blipFill>
         <p:spPr>
           <a:xfrm>
-            <a:off x="4176472" y="90343"/>
-            <a:ext cx="2120765" cy="2033924"/>
+            <a:off x="2109766" y="37306"/>
+            <a:ext cx="2085975" cy="2085975"/>
           </a:xfrm>
           <a:prstGeom prst="rect">
             <a:avLst/>
@@ -3518,7 +3536,7 @@
         </p:nvSpPr>
         <p:spPr>
           <a:xfrm>
-            <a:off x="-44064" y="-33048"/>
+            <a:off x="-54059" y="-60285"/>
             <a:ext cx="266420" cy="262829"/>
           </a:xfrm>
           <a:prstGeom prst="rect">
@@ -3553,7 +3571,7 @@
         </p:nvSpPr>
         <p:spPr>
           <a:xfrm>
-            <a:off x="1916666" y="-33048"/>
+            <a:off x="1971140" y="-60285"/>
             <a:ext cx="261610" cy="262829"/>
           </a:xfrm>
           <a:prstGeom prst="rect">
@@ -3588,7 +3606,7 @@
         </p:nvSpPr>
         <p:spPr>
           <a:xfrm>
-            <a:off x="3905635" y="-23485"/>
+            <a:off x="3991237" y="-50722"/>
             <a:ext cx="260008" cy="262829"/>
           </a:xfrm>
           <a:prstGeom prst="rect">
@@ -3623,7 +3641,7 @@
         </p:nvSpPr>
         <p:spPr>
           <a:xfrm>
-            <a:off x="50246" y="-1592"/>
+            <a:off x="76151" y="-28829"/>
             <a:ext cx="290464" cy="206082"/>
           </a:xfrm>
           <a:prstGeom prst="rect">
@@ -3658,7 +3676,7 @@
         </p:nvSpPr>
         <p:spPr>
           <a:xfrm>
-            <a:off x="-57459" y="1081591"/>
+            <a:off x="-34113" y="1044828"/>
             <a:ext cx="290464" cy="206082"/>
           </a:xfrm>
           <a:prstGeom prst="rect">
@@ -3693,7 +3711,7 @@
         </p:nvSpPr>
         <p:spPr>
           <a:xfrm>
-            <a:off x="1032364" y="1081433"/>
+            <a:off x="975540" y="1044670"/>
             <a:ext cx="290464" cy="206082"/>
           </a:xfrm>
           <a:prstGeom prst="rect">
@@ -3728,7 +3746,7 @@
         </p:nvSpPr>
         <p:spPr>
           <a:xfrm>
-            <a:off x="2016243" y="-1593"/>
+            <a:off x="2137806" y="-28829"/>
             <a:ext cx="290464" cy="206082"/>
           </a:xfrm>
           <a:prstGeom prst="rect">
@@ -3763,7 +3781,7 @@
         </p:nvSpPr>
         <p:spPr>
           <a:xfrm>
-            <a:off x="2016243" y="1081433"/>
+            <a:off x="2137806" y="1044587"/>
             <a:ext cx="290464" cy="206082"/>
           </a:xfrm>
           <a:prstGeom prst="rect">
@@ -3798,7 +3816,7 @@
         </p:nvSpPr>
         <p:spPr>
           <a:xfrm>
-            <a:off x="3134332" y="1087573"/>
+            <a:off x="3230777" y="1044587"/>
             <a:ext cx="290464" cy="206082"/>
           </a:xfrm>
           <a:prstGeom prst="rect">
@@ -3833,7 +3851,7 @@
         </p:nvSpPr>
         <p:spPr>
           <a:xfrm>
-            <a:off x="4021294" y="7968"/>
+            <a:off x="4106896" y="-19269"/>
             <a:ext cx="290464" cy="206082"/>
           </a:xfrm>
           <a:prstGeom prst="rect">
@@ -3868,7 +3886,7 @@
         </p:nvSpPr>
         <p:spPr>
           <a:xfrm>
-            <a:off x="4070063" y="1087148"/>
+            <a:off x="4033284" y="1039907"/>
             <a:ext cx="290464" cy="206082"/>
           </a:xfrm>
           <a:prstGeom prst="rect">
@@ -3903,7 +3921,7 @@
         </p:nvSpPr>
         <p:spPr>
           <a:xfrm>
-            <a:off x="5091622" y="1087148"/>
+            <a:off x="5103546" y="1047647"/>
             <a:ext cx="290464" cy="206082"/>
           </a:xfrm>
           <a:prstGeom prst="rect">
@@ -3938,7 +3956,7 @@
         </p:nvSpPr>
         <p:spPr>
           <a:xfrm>
-            <a:off x="5659257" y="1087148"/>
+            <a:off x="5627883" y="1047647"/>
             <a:ext cx="290464" cy="206082"/>
           </a:xfrm>
           <a:prstGeom prst="rect">
